--- a/presentations/product_similarity_conversation_deck.pptx
+++ b/presentations/product_similarity_conversation_deck.pptx
@@ -4962,7 +4962,7 @@
 </file>
 
 <file path=ppt/slides/slide10.xml><?xml version="1.0" encoding="utf-8"?>
-<p:sld xmlns:a="http://schemas.openxmlformats.org/drawingml/2006/main" xmlns:p="http://schemas.openxmlformats.org/presentationml/2006/main" xmlns:r="http://schemas.openxmlformats.org/officeDocument/2006/relationships">
+<p:sld xmlns:a="http://schemas.openxmlformats.org/drawingml/2006/main" xmlns:p="http://schemas.openxmlformats.org/presentationml/2006/main">
   <p:cSld>
     <p:bg>
       <p:bgPr>
@@ -5502,8 +5502,8 @@
         </p:nvSpPr>
         <p:spPr>
           <a:xfrm>
-            <a:off x="1508760" y="4069080"/>
-            <a:ext cx="9052560" cy="1417320"/>
+            <a:off x="1508760" y="3977640"/>
+            <a:ext cx="9052560" cy="1691640"/>
           </a:xfrm>
           <a:prstGeom prst="roundRect">
             <a:avLst>
@@ -5549,7 +5549,7 @@
         </p:nvSpPr>
         <p:spPr>
           <a:xfrm>
-            <a:off x="1709928" y="4233672"/>
+            <a:off x="1709928" y="4160520"/>
             <a:ext cx="8650224" cy="347472"/>
           </a:xfrm>
           <a:prstGeom prst="rect">
@@ -5584,8 +5584,8 @@
         </p:nvSpPr>
         <p:spPr>
           <a:xfrm>
-            <a:off x="1709928" y="4645152"/>
-            <a:ext cx="8650224" cy="731520"/>
+            <a:off x="1709928" y="4553712"/>
+            <a:ext cx="8650224" cy="1005840"/>
           </a:xfrm>
           <a:prstGeom prst="rect">
             <a:avLst/>
@@ -5600,9 +5600,9 @@
           <a:p>
             <a:pPr>
               <a:spcAft>
-                <a:spcPts val="400"/>
-              </a:spcAft>
-              <a:defRPr sz="1250">
+                <a:spcPts val="120"/>
+              </a:spcAft>
+              <a:defRPr sz="1150">
                 <a:solidFill>
                   <a:srgbClr val="18212F"/>
                 </a:solidFill>
@@ -5615,9 +5615,9 @@
           <a:p>
             <a:pPr>
               <a:spcAft>
-                <a:spcPts val="400"/>
-              </a:spcAft>
-              <a:defRPr sz="1250">
+                <a:spcPts val="120"/>
+              </a:spcAft>
+              <a:defRPr sz="1150">
                 <a:solidFill>
                   <a:srgbClr val="18212F"/>
                 </a:solidFill>
@@ -5630,9 +5630,9 @@
           <a:p>
             <a:pPr>
               <a:spcAft>
-                <a:spcPts val="400"/>
-              </a:spcAft>
-              <a:defRPr sz="1250">
+                <a:spcPts val="120"/>
+              </a:spcAft>
+              <a:defRPr sz="1150">
                 <a:solidFill>
                   <a:srgbClr val="18212F"/>
                 </a:solidFill>
@@ -5645,9 +5645,9 @@
           <a:p>
             <a:pPr>
               <a:spcAft>
-                <a:spcPts val="400"/>
-              </a:spcAft>
-              <a:defRPr sz="1250">
+                <a:spcPts val="120"/>
+              </a:spcAft>
+              <a:defRPr sz="1150">
                 <a:solidFill>
                   <a:srgbClr val="18212F"/>
                 </a:solidFill>
@@ -6562,7 +6562,7 @@
 </file>
 
 <file path=ppt/slides/slide13.xml><?xml version="1.0" encoding="utf-8"?>
-<p:sld xmlns:a="http://schemas.openxmlformats.org/drawingml/2006/main" xmlns:p="http://schemas.openxmlformats.org/presentationml/2006/main" xmlns:r="http://schemas.openxmlformats.org/officeDocument/2006/relationships">
+<p:sld xmlns:a="http://schemas.openxmlformats.org/drawingml/2006/main" xmlns:p="http://schemas.openxmlformats.org/presentationml/2006/main">
   <p:cSld>
     <p:bg>
       <p:bgPr>
@@ -7467,8 +7467,8 @@
         </p:nvSpPr>
         <p:spPr>
           <a:xfrm>
-            <a:off x="1234440" y="5349240"/>
-            <a:ext cx="9692640" cy="685800"/>
+            <a:off x="1234440" y="5102352"/>
+            <a:ext cx="9692640" cy="1097280"/>
           </a:xfrm>
           <a:prstGeom prst="roundRect">
             <a:avLst>
@@ -7514,7 +7514,7 @@
         </p:nvSpPr>
         <p:spPr>
           <a:xfrm>
-            <a:off x="1417320" y="5486400"/>
+            <a:off x="1417320" y="5248656"/>
             <a:ext cx="9326880" cy="329184"/>
           </a:xfrm>
           <a:prstGeom prst="rect">
@@ -7549,8 +7549,8 @@
         </p:nvSpPr>
         <p:spPr>
           <a:xfrm>
-            <a:off x="1417320" y="5861304"/>
-            <a:ext cx="9326880" cy="91439"/>
+            <a:off x="1417320" y="5605272"/>
+            <a:ext cx="9326880" cy="530352"/>
           </a:xfrm>
           <a:prstGeom prst="rect">
             <a:avLst/>
@@ -7565,9 +7565,9 @@
           <a:p>
             <a:pPr>
               <a:spcAft>
-                <a:spcPts val="300"/>
-              </a:spcAft>
-              <a:defRPr sz="1120">
+                <a:spcPts val="0"/>
+              </a:spcAft>
+              <a:defRPr sz="1050">
                 <a:solidFill>
                   <a:srgbClr val="18212F"/>
                 </a:solidFill>
@@ -7623,7 +7623,7 @@
 </file>
 
 <file path=ppt/slides/slide14.xml><?xml version="1.0" encoding="utf-8"?>
-<p:sld xmlns:a="http://schemas.openxmlformats.org/drawingml/2006/main" xmlns:p="http://schemas.openxmlformats.org/presentationml/2006/main" xmlns:r="http://schemas.openxmlformats.org/officeDocument/2006/relationships">
+<p:sld xmlns:a="http://schemas.openxmlformats.org/drawingml/2006/main" xmlns:p="http://schemas.openxmlformats.org/presentationml/2006/main">
   <p:cSld>
     <p:bg>
       <p:bgPr>
@@ -8213,8 +8213,8 @@
         </p:nvSpPr>
         <p:spPr>
           <a:xfrm>
-            <a:off x="594360" y="3886200"/>
-            <a:ext cx="3520440" cy="1417320"/>
+            <a:off x="594360" y="3840480"/>
+            <a:ext cx="3520440" cy="1737360"/>
           </a:xfrm>
           <a:prstGeom prst="roundRect">
             <a:avLst>
@@ -8260,7 +8260,7 @@
         </p:nvSpPr>
         <p:spPr>
           <a:xfrm>
-            <a:off x="777240" y="4023360"/>
+            <a:off x="777240" y="3986784"/>
             <a:ext cx="3154680" cy="329184"/>
           </a:xfrm>
           <a:prstGeom prst="rect">
@@ -8295,8 +8295,8 @@
         </p:nvSpPr>
         <p:spPr>
           <a:xfrm>
-            <a:off x="777240" y="4398264"/>
-            <a:ext cx="3154680" cy="822960"/>
+            <a:off x="777240" y="4352544"/>
+            <a:ext cx="3154680" cy="1115568"/>
           </a:xfrm>
           <a:prstGeom prst="rect">
             <a:avLst/>
@@ -8311,9 +8311,9 @@
           <a:p>
             <a:pPr>
               <a:spcAft>
-                <a:spcPts val="300"/>
-              </a:spcAft>
-              <a:defRPr sz="1200">
+                <a:spcPts val="0"/>
+              </a:spcAft>
+              <a:defRPr sz="1050">
                 <a:solidFill>
                   <a:srgbClr val="18212F"/>
                 </a:solidFill>
@@ -8326,9 +8326,9 @@
           <a:p>
             <a:pPr>
               <a:spcAft>
-                <a:spcPts val="300"/>
-              </a:spcAft>
-              <a:defRPr sz="1200">
+                <a:spcPts val="0"/>
+              </a:spcAft>
+              <a:defRPr sz="1050">
                 <a:solidFill>
                   <a:srgbClr val="18212F"/>
                 </a:solidFill>
@@ -8348,8 +8348,8 @@
         </p:nvSpPr>
         <p:spPr>
           <a:xfrm>
-            <a:off x="4343400" y="3886200"/>
-            <a:ext cx="3520440" cy="1417320"/>
+            <a:off x="4343400" y="3840480"/>
+            <a:ext cx="3520440" cy="1737360"/>
           </a:xfrm>
           <a:prstGeom prst="roundRect">
             <a:avLst>
@@ -8395,7 +8395,7 @@
         </p:nvSpPr>
         <p:spPr>
           <a:xfrm>
-            <a:off x="4526280" y="4023360"/>
+            <a:off x="4526280" y="3986784"/>
             <a:ext cx="3154680" cy="329184"/>
           </a:xfrm>
           <a:prstGeom prst="rect">
@@ -8430,8 +8430,8 @@
         </p:nvSpPr>
         <p:spPr>
           <a:xfrm>
-            <a:off x="4526280" y="4398264"/>
-            <a:ext cx="3154680" cy="822960"/>
+            <a:off x="4526280" y="4352544"/>
+            <a:ext cx="3154680" cy="1115568"/>
           </a:xfrm>
           <a:prstGeom prst="rect">
             <a:avLst/>
@@ -8446,9 +8446,9 @@
           <a:p>
             <a:pPr>
               <a:spcAft>
-                <a:spcPts val="300"/>
-              </a:spcAft>
-              <a:defRPr sz="1200">
+                <a:spcPts val="0"/>
+              </a:spcAft>
+              <a:defRPr sz="1100">
                 <a:solidFill>
                   <a:srgbClr val="18212F"/>
                 </a:solidFill>
@@ -8461,9 +8461,9 @@
           <a:p>
             <a:pPr>
               <a:spcAft>
-                <a:spcPts val="300"/>
-              </a:spcAft>
-              <a:defRPr sz="1200">
+                <a:spcPts val="0"/>
+              </a:spcAft>
+              <a:defRPr sz="1100">
                 <a:solidFill>
                   <a:srgbClr val="18212F"/>
                 </a:solidFill>
@@ -8476,9 +8476,9 @@
           <a:p>
             <a:pPr>
               <a:spcAft>
-                <a:spcPts val="300"/>
-              </a:spcAft>
-              <a:defRPr sz="1200">
+                <a:spcPts val="0"/>
+              </a:spcAft>
+              <a:defRPr sz="1100">
                 <a:solidFill>
                   <a:srgbClr val="18212F"/>
                 </a:solidFill>
@@ -8491,9 +8491,9 @@
           <a:p>
             <a:pPr>
               <a:spcAft>
-                <a:spcPts val="300"/>
-              </a:spcAft>
-              <a:defRPr sz="1200">
+                <a:spcPts val="0"/>
+              </a:spcAft>
+              <a:defRPr sz="1100">
                 <a:solidFill>
                   <a:srgbClr val="18212F"/>
                 </a:solidFill>
@@ -8513,8 +8513,8 @@
         </p:nvSpPr>
         <p:spPr>
           <a:xfrm>
-            <a:off x="8092440" y="3886200"/>
-            <a:ext cx="3520440" cy="1417320"/>
+            <a:off x="8092440" y="3840480"/>
+            <a:ext cx="3520440" cy="1737360"/>
           </a:xfrm>
           <a:prstGeom prst="roundRect">
             <a:avLst>
@@ -8560,7 +8560,7 @@
         </p:nvSpPr>
         <p:spPr>
           <a:xfrm>
-            <a:off x="8275319" y="4023360"/>
+            <a:off x="8275320" y="3986784"/>
             <a:ext cx="3154680" cy="329184"/>
           </a:xfrm>
           <a:prstGeom prst="rect">
@@ -8595,8 +8595,8 @@
         </p:nvSpPr>
         <p:spPr>
           <a:xfrm>
-            <a:off x="8275319" y="4398264"/>
-            <a:ext cx="3154680" cy="822960"/>
+            <a:off x="8275320" y="4352544"/>
+            <a:ext cx="3154680" cy="1115568"/>
           </a:xfrm>
           <a:prstGeom prst="rect">
             <a:avLst/>
@@ -8611,9 +8611,9 @@
           <a:p>
             <a:pPr>
               <a:spcAft>
-                <a:spcPts val="300"/>
-              </a:spcAft>
-              <a:defRPr sz="1200">
+                <a:spcPts val="0"/>
+              </a:spcAft>
+              <a:defRPr sz="1100">
                 <a:solidFill>
                   <a:srgbClr val="18212F"/>
                 </a:solidFill>
@@ -11442,7 +11442,7 @@
 </file>
 
 <file path=ppt/slides/slide6.xml><?xml version="1.0" encoding="utf-8"?>
-<p:sld xmlns:a="http://schemas.openxmlformats.org/drawingml/2006/main" xmlns:p="http://schemas.openxmlformats.org/presentationml/2006/main" xmlns:r="http://schemas.openxmlformats.org/officeDocument/2006/relationships">
+<p:sld xmlns:a="http://schemas.openxmlformats.org/drawingml/2006/main" xmlns:p="http://schemas.openxmlformats.org/presentationml/2006/main">
   <p:cSld>
     <p:bg>
       <p:bgPr>
@@ -12057,8 +12057,8 @@
         </p:nvSpPr>
         <p:spPr>
           <a:xfrm>
-            <a:off x="2788920" y="4709160"/>
-            <a:ext cx="6720840" cy="914400"/>
+            <a:off x="2788920" y="4617720"/>
+            <a:ext cx="6720840" cy="1143000"/>
           </a:xfrm>
           <a:prstGeom prst="roundRect">
             <a:avLst>
@@ -12104,8 +12104,8 @@
         </p:nvSpPr>
         <p:spPr>
           <a:xfrm>
-            <a:off x="2990088" y="4873752"/>
-            <a:ext cx="6318503" cy="347472"/>
+            <a:off x="2990088" y="4782312"/>
+            <a:ext cx="6318504" cy="347472"/>
           </a:xfrm>
           <a:prstGeom prst="rect">
             <a:avLst/>
@@ -12139,8 +12139,8 @@
         </p:nvSpPr>
         <p:spPr>
           <a:xfrm>
-            <a:off x="2990088" y="5285232"/>
-            <a:ext cx="6318503" cy="228600"/>
+            <a:off x="2990088" y="5184648"/>
+            <a:ext cx="6318504" cy="502920"/>
           </a:xfrm>
           <a:prstGeom prst="rect">
             <a:avLst/>
@@ -12155,9 +12155,9 @@
           <a:p>
             <a:pPr>
               <a:spcAft>
-                <a:spcPts val="400"/>
-              </a:spcAft>
-              <a:defRPr sz="1250">
+                <a:spcPts val="0"/>
+              </a:spcAft>
+              <a:defRPr sz="1150">
                 <a:solidFill>
                   <a:srgbClr val="18212F"/>
                 </a:solidFill>
@@ -12170,9 +12170,9 @@
           <a:p>
             <a:pPr>
               <a:spcAft>
-                <a:spcPts val="400"/>
-              </a:spcAft>
-              <a:defRPr sz="1250">
+                <a:spcPts val="0"/>
+              </a:spcAft>
+              <a:defRPr sz="1150">
                 <a:solidFill>
                   <a:srgbClr val="18212F"/>
                 </a:solidFill>
